--- a/presentation/technical_defense_final.pptx
+++ b/presentation/technical_defense_final.pptx
@@ -7339,8 +7339,8 @@
         </p:blipFill>
         <p:spPr>
           <a:xfrm>
-            <a:off x="4023360" y="1463040"/>
-            <a:ext cx="3653776" cy="4937760"/>
+            <a:off x="4031918" y="1463040"/>
+            <a:ext cx="3636660" cy="4937760"/>
           </a:xfrm>
           <a:prstGeom prst="rect">
             <a:avLst/>
